--- a/output/wordlabs-revise-3day.pptx
+++ b/output/wordlabs-revise-3day.pptx
@@ -23243,11 +23243,11 @@
         <p:spPr>
           <a:xfrm>
             <a:off x="1874520" y="4096512"/>
-            <a:ext cx="6903720" cy="804672"/>
+            <a:ext cx="6903720" cy="658368"/>
           </a:xfrm>
           <a:prstGeom prst="rect">
             <a:avLst>
-              <a:gd name="adj" fmla="val 6818"/>
+              <a:gd name="adj" fmla="val 8333"/>
             </a:avLst>
           </a:prstGeom>
           <a:solidFill>
@@ -23269,12 +23269,12 @@
         </p:nvSpPr>
         <p:spPr>
           <a:xfrm>
-            <a:off x="2254649" y="4169664"/>
-            <a:ext cx="685800" cy="384048"/>
+            <a:off x="2124837" y="4169664"/>
+            <a:ext cx="685800" cy="475488"/>
           </a:xfrm>
           <a:prstGeom prst="rect">
             <a:avLst>
-              <a:gd name="adj" fmla="val 9524"/>
+              <a:gd name="adj" fmla="val 7692"/>
             </a:avLst>
           </a:prstGeom>
           <a:solidFill>
@@ -23296,8 +23296,8 @@
         </p:nvSpPr>
         <p:spPr>
           <a:xfrm>
-            <a:off x="2254649" y="4169664"/>
-            <a:ext cx="685800" cy="384048"/>
+            <a:off x="2124837" y="4169664"/>
+            <a:ext cx="685800" cy="475488"/>
           </a:xfrm>
           <a:prstGeom prst="rect">
             <a:avLst/>
@@ -23335,12 +23335,12 @@
         </p:nvSpPr>
         <p:spPr>
           <a:xfrm>
-            <a:off x="3293146" y="4169664"/>
-            <a:ext cx="685800" cy="384048"/>
+            <a:off x="3033522" y="4169664"/>
+            <a:ext cx="685800" cy="475488"/>
           </a:xfrm>
           <a:prstGeom prst="rect">
             <a:avLst>
-              <a:gd name="adj" fmla="val 9524"/>
+              <a:gd name="adj" fmla="val 7692"/>
             </a:avLst>
           </a:prstGeom>
           <a:solidFill>
@@ -23362,8 +23362,8 @@
         </p:nvSpPr>
         <p:spPr>
           <a:xfrm>
-            <a:off x="3293146" y="4169664"/>
-            <a:ext cx="685800" cy="384048"/>
+            <a:off x="3033522" y="4169664"/>
+            <a:ext cx="685800" cy="475488"/>
           </a:xfrm>
           <a:prstGeom prst="rect">
             <a:avLst/>
@@ -23401,12 +23401,12 @@
         </p:nvSpPr>
         <p:spPr>
           <a:xfrm>
-            <a:off x="4331643" y="4169664"/>
-            <a:ext cx="685800" cy="384048"/>
+            <a:off x="3942207" y="4169664"/>
+            <a:ext cx="685800" cy="475488"/>
           </a:xfrm>
           <a:prstGeom prst="rect">
             <a:avLst>
-              <a:gd name="adj" fmla="val 9524"/>
+              <a:gd name="adj" fmla="val 7692"/>
             </a:avLst>
           </a:prstGeom>
           <a:solidFill>
@@ -23428,8 +23428,8 @@
         </p:nvSpPr>
         <p:spPr>
           <a:xfrm>
-            <a:off x="4331643" y="4169664"/>
-            <a:ext cx="685800" cy="384048"/>
+            <a:off x="3942207" y="4169664"/>
+            <a:ext cx="685800" cy="475488"/>
           </a:xfrm>
           <a:prstGeom prst="rect">
             <a:avLst/>
@@ -23467,12 +23467,12 @@
         </p:nvSpPr>
         <p:spPr>
           <a:xfrm>
-            <a:off x="5370141" y="4169664"/>
-            <a:ext cx="685800" cy="384048"/>
+            <a:off x="4850892" y="4169664"/>
+            <a:ext cx="685800" cy="475488"/>
           </a:xfrm>
           <a:prstGeom prst="rect">
             <a:avLst>
-              <a:gd name="adj" fmla="val 9524"/>
+              <a:gd name="adj" fmla="val 7692"/>
             </a:avLst>
           </a:prstGeom>
           <a:solidFill>
@@ -23494,8 +23494,8 @@
         </p:nvSpPr>
         <p:spPr>
           <a:xfrm>
-            <a:off x="5370141" y="4169664"/>
-            <a:ext cx="685800" cy="384048"/>
+            <a:off x="4850892" y="4169664"/>
+            <a:ext cx="685800" cy="475488"/>
           </a:xfrm>
           <a:prstGeom prst="rect">
             <a:avLst/>
@@ -23519,7 +23519,7 @@
                 <a:ea typeface="Trebuchet MS" pitchFamily="34" charset="-122"/>
                 <a:cs typeface="Trebuchet MS" pitchFamily="34" charset="-120"/>
               </a:rPr>
-              <a:t>ie</a:t>
+              <a:t>i</a:t>
             </a:r>
             <a:endParaRPr lang="en-US" sz="900" dirty="0"/>
           </a:p>
@@ -23533,12 +23533,12 @@
         </p:nvSpPr>
         <p:spPr>
           <a:xfrm>
-            <a:off x="6408638" y="4169664"/>
-            <a:ext cx="685800" cy="384048"/>
+            <a:off x="5759577" y="4169664"/>
+            <a:ext cx="685800" cy="475488"/>
           </a:xfrm>
           <a:prstGeom prst="rect">
             <a:avLst>
-              <a:gd name="adj" fmla="val 9524"/>
+              <a:gd name="adj" fmla="val 7692"/>
             </a:avLst>
           </a:prstGeom>
           <a:solidFill>
@@ -23560,8 +23560,8 @@
         </p:nvSpPr>
         <p:spPr>
           <a:xfrm>
-            <a:off x="6408638" y="4169664"/>
-            <a:ext cx="685800" cy="384048"/>
+            <a:off x="5759577" y="4169664"/>
+            <a:ext cx="685800" cy="475488"/>
           </a:xfrm>
           <a:prstGeom prst="rect">
             <a:avLst/>
@@ -23585,7 +23585,7 @@
                 <a:ea typeface="Trebuchet MS" pitchFamily="34" charset="-122"/>
                 <a:cs typeface="Trebuchet MS" pitchFamily="34" charset="-120"/>
               </a:rPr>
-              <a:t>z</a:t>
+              <a:t>s</a:t>
             </a:r>
             <a:endParaRPr lang="en-US" sz="900" dirty="0"/>
           </a:p>
@@ -23593,57 +23593,18 @@
       </p:sp>
       <p:sp>
         <p:nvSpPr>
-          <p:cNvPr id="47" name="Text 45"/>
-          <p:cNvSpPr/>
-          <p:nvPr/>
-        </p:nvSpPr>
-        <p:spPr>
-          <a:xfrm>
-            <a:off x="6408638" y="4572000"/>
-            <a:ext cx="685800" cy="219456"/>
-          </a:xfrm>
-          <a:prstGeom prst="rect">
-            <a:avLst/>
-          </a:prstGeom>
-          <a:noFill/>
-          <a:ln/>
-        </p:spPr>
-        <p:txBody>
-          <a:bodyPr wrap="square" lIns="0" tIns="0" rIns="0" bIns="0" rtlCol="0" anchor="t"/>
-          <a:lstStyle/>
-          <a:p>
-            <a:pPr algn="ctr" indent="0" marL="0">
-              <a:buNone/>
-            </a:pPr>
-            <a:r>
-              <a:rPr lang="en-US" sz="750" i="1" dirty="0">
-                <a:solidFill>
-                  <a:srgbClr val="94A3B8"/>
-                </a:solidFill>
-                <a:latin typeface="Calibri" pitchFamily="34" charset="0"/>
-                <a:ea typeface="Calibri" pitchFamily="34" charset="-122"/>
-                <a:cs typeface="Calibri" pitchFamily="34" charset="-120"/>
-              </a:rPr>
-              <a:t>/z/</a:t>
-            </a:r>
-            <a:endParaRPr lang="en-US" sz="750" dirty="0"/>
-          </a:p>
-        </p:txBody>
-      </p:sp>
-      <p:sp>
-        <p:nvSpPr>
-          <p:cNvPr id="48" name="Shape 46"/>
-          <p:cNvSpPr/>
-          <p:nvPr/>
-        </p:nvSpPr>
-        <p:spPr>
-          <a:xfrm>
-            <a:off x="7447135" y="4169664"/>
-            <a:ext cx="685800" cy="384048"/>
+          <p:cNvPr id="47" name="Shape 45"/>
+          <p:cNvSpPr/>
+          <p:nvPr/>
+        </p:nvSpPr>
+        <p:spPr>
+          <a:xfrm>
+            <a:off x="6668262" y="4169664"/>
+            <a:ext cx="685800" cy="475488"/>
           </a:xfrm>
           <a:prstGeom prst="rect">
             <a:avLst>
-              <a:gd name="adj" fmla="val 9524"/>
+              <a:gd name="adj" fmla="val 7692"/>
             </a:avLst>
           </a:prstGeom>
           <a:solidFill>
@@ -23659,14 +23620,80 @@
       </p:sp>
       <p:sp>
         <p:nvSpPr>
-          <p:cNvPr id="49" name="Text 47"/>
-          <p:cNvSpPr/>
-          <p:nvPr/>
-        </p:nvSpPr>
-        <p:spPr>
-          <a:xfrm>
-            <a:off x="7447135" y="4169664"/>
-            <a:ext cx="685800" cy="384048"/>
+          <p:cNvPr id="48" name="Text 46"/>
+          <p:cNvSpPr/>
+          <p:nvPr/>
+        </p:nvSpPr>
+        <p:spPr>
+          <a:xfrm>
+            <a:off x="6668262" y="4169664"/>
+            <a:ext cx="685800" cy="475488"/>
+          </a:xfrm>
+          <a:prstGeom prst="rect">
+            <a:avLst/>
+          </a:prstGeom>
+          <a:noFill/>
+          <a:ln/>
+        </p:spPr>
+        <p:txBody>
+          <a:bodyPr wrap="square" lIns="0" tIns="0" rIns="0" bIns="0" rtlCol="0" anchor="ctr"/>
+          <a:lstStyle/>
+          <a:p>
+            <a:pPr algn="ctr" indent="0" marL="0">
+              <a:buNone/>
+            </a:pPr>
+            <a:r>
+              <a:rPr lang="en-US" sz="900" b="1" dirty="0">
+                <a:solidFill>
+                  <a:srgbClr val="9D174D"/>
+                </a:solidFill>
+                <a:latin typeface="Trebuchet MS" pitchFamily="34" charset="0"/>
+                <a:ea typeface="Trebuchet MS" pitchFamily="34" charset="-122"/>
+                <a:cs typeface="Trebuchet MS" pitchFamily="34" charset="-120"/>
+              </a:rPr>
+              <a:t>e</a:t>
+            </a:r>
+            <a:endParaRPr lang="en-US" sz="900" dirty="0"/>
+          </a:p>
+        </p:txBody>
+      </p:sp>
+      <p:sp>
+        <p:nvSpPr>
+          <p:cNvPr id="49" name="Shape 47"/>
+          <p:cNvSpPr/>
+          <p:nvPr/>
+        </p:nvSpPr>
+        <p:spPr>
+          <a:xfrm>
+            <a:off x="7576947" y="4169664"/>
+            <a:ext cx="685800" cy="475488"/>
+          </a:xfrm>
+          <a:prstGeom prst="rect">
+            <a:avLst>
+              <a:gd name="adj" fmla="val 7692"/>
+            </a:avLst>
+          </a:prstGeom>
+          <a:solidFill>
+            <a:srgbClr val="FFFFFF"/>
+          </a:solidFill>
+          <a:ln w="12700">
+            <a:solidFill>
+              <a:srgbClr val="DB2777"/>
+            </a:solidFill>
+            <a:prstDash val="solid"/>
+          </a:ln>
+        </p:spPr>
+      </p:sp>
+      <p:sp>
+        <p:nvSpPr>
+          <p:cNvPr id="50" name="Text 48"/>
+          <p:cNvSpPr/>
+          <p:nvPr/>
+        </p:nvSpPr>
+        <p:spPr>
+          <a:xfrm>
+            <a:off x="7576947" y="4169664"/>
+            <a:ext cx="685800" cy="475488"/>
           </a:xfrm>
           <a:prstGeom prst="rect">
             <a:avLst/>
@@ -29277,11 +29304,11 @@
         <p:spPr>
           <a:xfrm>
             <a:off x="1874520" y="4096512"/>
-            <a:ext cx="6903720" cy="804672"/>
+            <a:ext cx="6903720" cy="658368"/>
           </a:xfrm>
           <a:prstGeom prst="rect">
             <a:avLst>
-              <a:gd name="adj" fmla="val 6818"/>
+              <a:gd name="adj" fmla="val 8333"/>
             </a:avLst>
           </a:prstGeom>
           <a:solidFill>
@@ -29303,12 +29330,12 @@
         </p:nvSpPr>
         <p:spPr>
           <a:xfrm>
-            <a:off x="2023872" y="4169664"/>
-            <a:ext cx="685800" cy="384048"/>
+            <a:off x="1951330" y="4169664"/>
+            <a:ext cx="676656" cy="475488"/>
           </a:xfrm>
           <a:prstGeom prst="rect">
             <a:avLst>
-              <a:gd name="adj" fmla="val 9524"/>
+              <a:gd name="adj" fmla="val 7692"/>
             </a:avLst>
           </a:prstGeom>
           <a:solidFill>
@@ -29330,8 +29357,8 @@
         </p:nvSpPr>
         <p:spPr>
           <a:xfrm>
-            <a:off x="2023872" y="4169664"/>
-            <a:ext cx="685800" cy="384048"/>
+            <a:off x="1951330" y="4169664"/>
+            <a:ext cx="676656" cy="475488"/>
           </a:xfrm>
           <a:prstGeom prst="rect">
             <a:avLst/>
@@ -29369,12 +29396,12 @@
         </p:nvSpPr>
         <p:spPr>
           <a:xfrm>
-            <a:off x="2831592" y="4169664"/>
-            <a:ext cx="685800" cy="384048"/>
+            <a:off x="2677363" y="4169664"/>
+            <a:ext cx="676656" cy="475488"/>
           </a:xfrm>
           <a:prstGeom prst="rect">
             <a:avLst>
-              <a:gd name="adj" fmla="val 9524"/>
+              <a:gd name="adj" fmla="val 7692"/>
             </a:avLst>
           </a:prstGeom>
           <a:solidFill>
@@ -29396,8 +29423,8 @@
         </p:nvSpPr>
         <p:spPr>
           <a:xfrm>
-            <a:off x="2831592" y="4169664"/>
-            <a:ext cx="685800" cy="384048"/>
+            <a:off x="2677363" y="4169664"/>
+            <a:ext cx="676656" cy="475488"/>
           </a:xfrm>
           <a:prstGeom prst="rect">
             <a:avLst/>
@@ -29435,12 +29462,12 @@
         </p:nvSpPr>
         <p:spPr>
           <a:xfrm>
-            <a:off x="3639312" y="4169664"/>
-            <a:ext cx="685800" cy="384048"/>
+            <a:off x="3403397" y="4169664"/>
+            <a:ext cx="676656" cy="475488"/>
           </a:xfrm>
           <a:prstGeom prst="rect">
             <a:avLst>
-              <a:gd name="adj" fmla="val 9524"/>
+              <a:gd name="adj" fmla="val 7692"/>
             </a:avLst>
           </a:prstGeom>
           <a:solidFill>
@@ -29462,8 +29489,8 @@
         </p:nvSpPr>
         <p:spPr>
           <a:xfrm>
-            <a:off x="3639312" y="4169664"/>
-            <a:ext cx="685800" cy="384048"/>
+            <a:off x="3403397" y="4169664"/>
+            <a:ext cx="676656" cy="475488"/>
           </a:xfrm>
           <a:prstGeom prst="rect">
             <a:avLst/>
@@ -29501,12 +29528,12 @@
         </p:nvSpPr>
         <p:spPr>
           <a:xfrm>
-            <a:off x="4447032" y="4169664"/>
-            <a:ext cx="685800" cy="384048"/>
+            <a:off x="4129430" y="4169664"/>
+            <a:ext cx="676656" cy="475488"/>
           </a:xfrm>
           <a:prstGeom prst="rect">
             <a:avLst>
-              <a:gd name="adj" fmla="val 9524"/>
+              <a:gd name="adj" fmla="val 7692"/>
             </a:avLst>
           </a:prstGeom>
           <a:solidFill>
@@ -29528,8 +29555,8 @@
         </p:nvSpPr>
         <p:spPr>
           <a:xfrm>
-            <a:off x="4447032" y="4169664"/>
-            <a:ext cx="685800" cy="384048"/>
+            <a:off x="4129430" y="4169664"/>
+            <a:ext cx="676656" cy="475488"/>
           </a:xfrm>
           <a:prstGeom prst="rect">
             <a:avLst/>
@@ -29567,12 +29594,12 @@
         </p:nvSpPr>
         <p:spPr>
           <a:xfrm>
-            <a:off x="5254752" y="4169664"/>
-            <a:ext cx="685800" cy="384048"/>
+            <a:off x="4855464" y="4169664"/>
+            <a:ext cx="676656" cy="475488"/>
           </a:xfrm>
           <a:prstGeom prst="rect">
             <a:avLst>
-              <a:gd name="adj" fmla="val 9524"/>
+              <a:gd name="adj" fmla="val 7692"/>
             </a:avLst>
           </a:prstGeom>
           <a:solidFill>
@@ -29594,8 +29621,8 @@
         </p:nvSpPr>
         <p:spPr>
           <a:xfrm>
-            <a:off x="5254752" y="4169664"/>
-            <a:ext cx="685800" cy="384048"/>
+            <a:off x="4855464" y="4169664"/>
+            <a:ext cx="676656" cy="475488"/>
           </a:xfrm>
           <a:prstGeom prst="rect">
             <a:avLst/>
@@ -29619,7 +29646,7 @@
                 <a:ea typeface="Trebuchet MS" pitchFamily="34" charset="-122"/>
                 <a:cs typeface="Trebuchet MS" pitchFamily="34" charset="-120"/>
               </a:rPr>
-              <a:t>z</a:t>
+              <a:t>s</a:t>
             </a:r>
             <a:endParaRPr lang="en-US" sz="900" dirty="0"/>
           </a:p>
@@ -29627,57 +29654,18 @@
       </p:sp>
       <p:sp>
         <p:nvSpPr>
-          <p:cNvPr id="53" name="Text 51"/>
-          <p:cNvSpPr/>
-          <p:nvPr/>
-        </p:nvSpPr>
-        <p:spPr>
-          <a:xfrm>
-            <a:off x="5254752" y="4572000"/>
-            <a:ext cx="685800" cy="219456"/>
-          </a:xfrm>
-          <a:prstGeom prst="rect">
-            <a:avLst/>
-          </a:prstGeom>
-          <a:noFill/>
-          <a:ln/>
-        </p:spPr>
-        <p:txBody>
-          <a:bodyPr wrap="square" lIns="0" tIns="0" rIns="0" bIns="0" rtlCol="0" anchor="t"/>
-          <a:lstStyle/>
-          <a:p>
-            <a:pPr algn="ctr" indent="0" marL="0">
-              <a:buNone/>
-            </a:pPr>
-            <a:r>
-              <a:rPr lang="en-US" sz="750" i="1" dirty="0">
-                <a:solidFill>
-                  <a:srgbClr val="94A3B8"/>
-                </a:solidFill>
-                <a:latin typeface="Calibri" pitchFamily="34" charset="0"/>
-                <a:ea typeface="Calibri" pitchFamily="34" charset="-122"/>
-                <a:cs typeface="Calibri" pitchFamily="34" charset="-120"/>
-              </a:rPr>
-              <a:t>/z/</a:t>
-            </a:r>
-            <a:endParaRPr lang="en-US" sz="750" dirty="0"/>
-          </a:p>
-        </p:txBody>
-      </p:sp>
-      <p:sp>
-        <p:nvSpPr>
-          <p:cNvPr id="54" name="Shape 52"/>
-          <p:cNvSpPr/>
-          <p:nvPr/>
-        </p:nvSpPr>
-        <p:spPr>
-          <a:xfrm>
-            <a:off x="6062472" y="4169664"/>
-            <a:ext cx="685800" cy="384048"/>
+          <p:cNvPr id="53" name="Shape 51"/>
+          <p:cNvSpPr/>
+          <p:nvPr/>
+        </p:nvSpPr>
+        <p:spPr>
+          <a:xfrm>
+            <a:off x="5581498" y="4169664"/>
+            <a:ext cx="676656" cy="475488"/>
           </a:xfrm>
           <a:prstGeom prst="rect">
             <a:avLst>
-              <a:gd name="adj" fmla="val 9524"/>
+              <a:gd name="adj" fmla="val 7692"/>
             </a:avLst>
           </a:prstGeom>
           <a:solidFill>
@@ -29693,14 +29681,14 @@
       </p:sp>
       <p:sp>
         <p:nvSpPr>
-          <p:cNvPr id="55" name="Text 53"/>
-          <p:cNvSpPr/>
-          <p:nvPr/>
-        </p:nvSpPr>
-        <p:spPr>
-          <a:xfrm>
-            <a:off x="6062472" y="4169664"/>
-            <a:ext cx="685800" cy="384048"/>
+          <p:cNvPr id="54" name="Text 52"/>
+          <p:cNvSpPr/>
+          <p:nvPr/>
+        </p:nvSpPr>
+        <p:spPr>
+          <a:xfrm>
+            <a:off x="5581498" y="4169664"/>
+            <a:ext cx="676656" cy="475488"/>
           </a:xfrm>
           <a:prstGeom prst="rect">
             <a:avLst/>
@@ -29732,18 +29720,18 @@
       </p:sp>
       <p:sp>
         <p:nvSpPr>
-          <p:cNvPr id="56" name="Shape 54"/>
-          <p:cNvSpPr/>
-          <p:nvPr/>
-        </p:nvSpPr>
-        <p:spPr>
-          <a:xfrm>
-            <a:off x="6870192" y="4169664"/>
-            <a:ext cx="685800" cy="384048"/>
+          <p:cNvPr id="55" name="Shape 53"/>
+          <p:cNvSpPr/>
+          <p:nvPr/>
+        </p:nvSpPr>
+        <p:spPr>
+          <a:xfrm>
+            <a:off x="6307531" y="4169664"/>
+            <a:ext cx="676656" cy="475488"/>
           </a:xfrm>
           <a:prstGeom prst="rect">
             <a:avLst>
-              <a:gd name="adj" fmla="val 9524"/>
+              <a:gd name="adj" fmla="val 7692"/>
             </a:avLst>
           </a:prstGeom>
           <a:solidFill>
@@ -29759,14 +29747,14 @@
       </p:sp>
       <p:sp>
         <p:nvSpPr>
-          <p:cNvPr id="57" name="Text 55"/>
-          <p:cNvSpPr/>
-          <p:nvPr/>
-        </p:nvSpPr>
-        <p:spPr>
-          <a:xfrm>
-            <a:off x="6870192" y="4169664"/>
-            <a:ext cx="685800" cy="384048"/>
+          <p:cNvPr id="56" name="Text 54"/>
+          <p:cNvSpPr/>
+          <p:nvPr/>
+        </p:nvSpPr>
+        <p:spPr>
+          <a:xfrm>
+            <a:off x="6307531" y="4169664"/>
+            <a:ext cx="676656" cy="475488"/>
           </a:xfrm>
           <a:prstGeom prst="rect">
             <a:avLst/>
@@ -29798,18 +29786,18 @@
       </p:sp>
       <p:sp>
         <p:nvSpPr>
-          <p:cNvPr id="58" name="Shape 56"/>
-          <p:cNvSpPr/>
-          <p:nvPr/>
-        </p:nvSpPr>
-        <p:spPr>
-          <a:xfrm>
-            <a:off x="7677912" y="4169664"/>
-            <a:ext cx="685800" cy="384048"/>
+          <p:cNvPr id="57" name="Shape 55"/>
+          <p:cNvSpPr/>
+          <p:nvPr/>
+        </p:nvSpPr>
+        <p:spPr>
+          <a:xfrm>
+            <a:off x="7033565" y="4169664"/>
+            <a:ext cx="676656" cy="475488"/>
           </a:xfrm>
           <a:prstGeom prst="rect">
             <a:avLst>
-              <a:gd name="adj" fmla="val 9524"/>
+              <a:gd name="adj" fmla="val 7692"/>
             </a:avLst>
           </a:prstGeom>
           <a:solidFill>
@@ -29825,14 +29813,14 @@
       </p:sp>
       <p:sp>
         <p:nvSpPr>
-          <p:cNvPr id="59" name="Text 57"/>
-          <p:cNvSpPr/>
-          <p:nvPr/>
-        </p:nvSpPr>
-        <p:spPr>
-          <a:xfrm>
-            <a:off x="7677912" y="4169664"/>
-            <a:ext cx="685800" cy="384048"/>
+          <p:cNvPr id="58" name="Text 56"/>
+          <p:cNvSpPr/>
+          <p:nvPr/>
+        </p:nvSpPr>
+        <p:spPr>
+          <a:xfrm>
+            <a:off x="7033565" y="4169664"/>
+            <a:ext cx="676656" cy="475488"/>
           </a:xfrm>
           <a:prstGeom prst="rect">
             <a:avLst/>
@@ -29856,7 +29844,73 @@
                 <a:ea typeface="Trebuchet MS" pitchFamily="34" charset="-122"/>
                 <a:cs typeface="Trebuchet MS" pitchFamily="34" charset="-120"/>
               </a:rPr>
-              <a:t>le</a:t>
+              <a:t>l</a:t>
+            </a:r>
+            <a:endParaRPr lang="en-US" sz="900" dirty="0"/>
+          </a:p>
+        </p:txBody>
+      </p:sp>
+      <p:sp>
+        <p:nvSpPr>
+          <p:cNvPr id="59" name="Shape 57"/>
+          <p:cNvSpPr/>
+          <p:nvPr/>
+        </p:nvSpPr>
+        <p:spPr>
+          <a:xfrm>
+            <a:off x="7759598" y="4169664"/>
+            <a:ext cx="676656" cy="475488"/>
+          </a:xfrm>
+          <a:prstGeom prst="rect">
+            <a:avLst>
+              <a:gd name="adj" fmla="val 7692"/>
+            </a:avLst>
+          </a:prstGeom>
+          <a:solidFill>
+            <a:srgbClr val="FFFFFF"/>
+          </a:solidFill>
+          <a:ln w="12700">
+            <a:solidFill>
+              <a:srgbClr val="DB2777"/>
+            </a:solidFill>
+            <a:prstDash val="solid"/>
+          </a:ln>
+        </p:spPr>
+      </p:sp>
+      <p:sp>
+        <p:nvSpPr>
+          <p:cNvPr id="60" name="Text 58"/>
+          <p:cNvSpPr/>
+          <p:nvPr/>
+        </p:nvSpPr>
+        <p:spPr>
+          <a:xfrm>
+            <a:off x="7759598" y="4169664"/>
+            <a:ext cx="676656" cy="475488"/>
+          </a:xfrm>
+          <a:prstGeom prst="rect">
+            <a:avLst/>
+          </a:prstGeom>
+          <a:noFill/>
+          <a:ln/>
+        </p:spPr>
+        <p:txBody>
+          <a:bodyPr wrap="square" lIns="0" tIns="0" rIns="0" bIns="0" rtlCol="0" anchor="ctr"/>
+          <a:lstStyle/>
+          <a:p>
+            <a:pPr algn="ctr" indent="0" marL="0">
+              <a:buNone/>
+            </a:pPr>
+            <a:r>
+              <a:rPr lang="en-US" sz="900" b="1" dirty="0">
+                <a:solidFill>
+                  <a:srgbClr val="9D174D"/>
+                </a:solidFill>
+                <a:latin typeface="Trebuchet MS" pitchFamily="34" charset="0"/>
+                <a:ea typeface="Trebuchet MS" pitchFamily="34" charset="-122"/>
+                <a:cs typeface="Trebuchet MS" pitchFamily="34" charset="-120"/>
+              </a:rPr>
+              <a:t>e</a:t>
             </a:r>
             <a:endParaRPr lang="en-US" sz="900" dirty="0"/>
           </a:p>
@@ -34514,11 +34568,11 @@
         <p:spPr>
           <a:xfrm>
             <a:off x="1874520" y="4096512"/>
-            <a:ext cx="6903720" cy="804672"/>
+            <a:ext cx="6903720" cy="658368"/>
           </a:xfrm>
           <a:prstGeom prst="rect">
             <a:avLst>
-              <a:gd name="adj" fmla="val 6818"/>
+              <a:gd name="adj" fmla="val 8333"/>
             </a:avLst>
           </a:prstGeom>
           <a:solidFill>
@@ -34541,11 +34595,11 @@
         <p:spPr>
           <a:xfrm>
             <a:off x="2254649" y="4169664"/>
-            <a:ext cx="685800" cy="384048"/>
+            <a:ext cx="685800" cy="475488"/>
           </a:xfrm>
           <a:prstGeom prst="rect">
             <a:avLst>
-              <a:gd name="adj" fmla="val 9524"/>
+              <a:gd name="adj" fmla="val 7692"/>
             </a:avLst>
           </a:prstGeom>
           <a:solidFill>
@@ -34568,7 +34622,7 @@
         <p:spPr>
           <a:xfrm>
             <a:off x="2254649" y="4169664"/>
-            <a:ext cx="685800" cy="384048"/>
+            <a:ext cx="685800" cy="475488"/>
           </a:xfrm>
           <a:prstGeom prst="rect">
             <a:avLst/>
@@ -34607,11 +34661,11 @@
         <p:spPr>
           <a:xfrm>
             <a:off x="3293146" y="4169664"/>
-            <a:ext cx="685800" cy="384048"/>
+            <a:ext cx="685800" cy="475488"/>
           </a:xfrm>
           <a:prstGeom prst="rect">
             <a:avLst>
-              <a:gd name="adj" fmla="val 9524"/>
+              <a:gd name="adj" fmla="val 7692"/>
             </a:avLst>
           </a:prstGeom>
           <a:solidFill>
@@ -34634,7 +34688,7 @@
         <p:spPr>
           <a:xfrm>
             <a:off x="3293146" y="4169664"/>
-            <a:ext cx="685800" cy="384048"/>
+            <a:ext cx="685800" cy="475488"/>
           </a:xfrm>
           <a:prstGeom prst="rect">
             <a:avLst/>
@@ -34673,11 +34727,11 @@
         <p:spPr>
           <a:xfrm>
             <a:off x="4331643" y="4169664"/>
-            <a:ext cx="685800" cy="384048"/>
+            <a:ext cx="685800" cy="475488"/>
           </a:xfrm>
           <a:prstGeom prst="rect">
             <a:avLst>
-              <a:gd name="adj" fmla="val 9524"/>
+              <a:gd name="adj" fmla="val 7692"/>
             </a:avLst>
           </a:prstGeom>
           <a:solidFill>
@@ -34700,7 +34754,7 @@
         <p:spPr>
           <a:xfrm>
             <a:off x="4331643" y="4169664"/>
-            <a:ext cx="685800" cy="384048"/>
+            <a:ext cx="685800" cy="475488"/>
           </a:xfrm>
           <a:prstGeom prst="rect">
             <a:avLst/>
@@ -34739,11 +34793,11 @@
         <p:spPr>
           <a:xfrm>
             <a:off x="5370141" y="4169664"/>
-            <a:ext cx="685800" cy="384048"/>
+            <a:ext cx="685800" cy="475488"/>
           </a:xfrm>
           <a:prstGeom prst="rect">
             <a:avLst>
-              <a:gd name="adj" fmla="val 9524"/>
+              <a:gd name="adj" fmla="val 7692"/>
             </a:avLst>
           </a:prstGeom>
           <a:solidFill>
@@ -34766,7 +34820,7 @@
         <p:spPr>
           <a:xfrm>
             <a:off x="5370141" y="4169664"/>
-            <a:ext cx="685800" cy="384048"/>
+            <a:ext cx="685800" cy="475488"/>
           </a:xfrm>
           <a:prstGeom prst="rect">
             <a:avLst/>
@@ -34805,11 +34859,11 @@
         <p:spPr>
           <a:xfrm>
             <a:off x="6408638" y="4169664"/>
-            <a:ext cx="685800" cy="384048"/>
+            <a:ext cx="685800" cy="475488"/>
           </a:xfrm>
           <a:prstGeom prst="rect">
             <a:avLst>
-              <a:gd name="adj" fmla="val 9524"/>
+              <a:gd name="adj" fmla="val 7692"/>
             </a:avLst>
           </a:prstGeom>
           <a:solidFill>
@@ -34832,7 +34886,7 @@
         <p:spPr>
           <a:xfrm>
             <a:off x="6408638" y="4169664"/>
-            <a:ext cx="685800" cy="384048"/>
+            <a:ext cx="685800" cy="475488"/>
           </a:xfrm>
           <a:prstGeom prst="rect">
             <a:avLst/>
@@ -34856,7 +34910,7 @@
                 <a:ea typeface="Trebuchet MS" pitchFamily="34" charset="-122"/>
                 <a:cs typeface="Trebuchet MS" pitchFamily="34" charset="-120"/>
               </a:rPr>
-              <a:t>z</a:t>
+              <a:t>s</a:t>
             </a:r>
             <a:endParaRPr lang="en-US" sz="900" dirty="0"/>
           </a:p>
@@ -34864,57 +34918,18 @@
       </p:sp>
       <p:sp>
         <p:nvSpPr>
-          <p:cNvPr id="50" name="Text 48"/>
-          <p:cNvSpPr/>
-          <p:nvPr/>
-        </p:nvSpPr>
-        <p:spPr>
-          <a:xfrm>
-            <a:off x="6408638" y="4572000"/>
-            <a:ext cx="685800" cy="219456"/>
-          </a:xfrm>
-          <a:prstGeom prst="rect">
-            <a:avLst/>
-          </a:prstGeom>
-          <a:noFill/>
-          <a:ln/>
-        </p:spPr>
-        <p:txBody>
-          <a:bodyPr wrap="square" lIns="0" tIns="0" rIns="0" bIns="0" rtlCol="0" anchor="t"/>
-          <a:lstStyle/>
-          <a:p>
-            <a:pPr algn="ctr" indent="0" marL="0">
-              <a:buNone/>
-            </a:pPr>
-            <a:r>
-              <a:rPr lang="en-US" sz="750" i="1" dirty="0">
-                <a:solidFill>
-                  <a:srgbClr val="94A3B8"/>
-                </a:solidFill>
-                <a:latin typeface="Calibri" pitchFamily="34" charset="0"/>
-                <a:ea typeface="Calibri" pitchFamily="34" charset="-122"/>
-                <a:cs typeface="Calibri" pitchFamily="34" charset="-120"/>
-              </a:rPr>
-              <a:t>/z/</a:t>
-            </a:r>
-            <a:endParaRPr lang="en-US" sz="750" dirty="0"/>
-          </a:p>
-        </p:txBody>
-      </p:sp>
-      <p:sp>
-        <p:nvSpPr>
-          <p:cNvPr id="51" name="Shape 49"/>
+          <p:cNvPr id="50" name="Shape 48"/>
           <p:cNvSpPr/>
           <p:nvPr/>
         </p:nvSpPr>
         <p:spPr>
           <a:xfrm>
             <a:off x="7447135" y="4169664"/>
-            <a:ext cx="685800" cy="384048"/>
+            <a:ext cx="685800" cy="475488"/>
           </a:xfrm>
           <a:prstGeom prst="rect">
             <a:avLst>
-              <a:gd name="adj" fmla="val 9524"/>
+              <a:gd name="adj" fmla="val 7692"/>
             </a:avLst>
           </a:prstGeom>
           <a:solidFill>
@@ -34930,14 +34945,14 @@
       </p:sp>
       <p:sp>
         <p:nvSpPr>
-          <p:cNvPr id="52" name="Text 50"/>
+          <p:cNvPr id="51" name="Text 49"/>
           <p:cNvSpPr/>
           <p:nvPr/>
         </p:nvSpPr>
         <p:spPr>
           <a:xfrm>
             <a:off x="7447135" y="4169664"/>
-            <a:ext cx="685800" cy="384048"/>
+            <a:ext cx="685800" cy="475488"/>
           </a:xfrm>
           <a:prstGeom prst="rect">
             <a:avLst/>
@@ -39218,7 +39233,7 @@
                 <a:ea typeface="Calibri" pitchFamily="34" charset="-122"/>
                 <a:cs typeface="Calibri" pitchFamily="34" charset="-120"/>
               </a:rPr>
-              <a:t>1.  The prefix 'un-' in 'unrevised' means not or opposite of.</a:t>
+              <a:t>1.  The root 'revise' comes from Latin and means to look at again.</a:t>
             </a:r>
             <a:endParaRPr lang="en-US" sz="1300" dirty="0"/>
           </a:p>
@@ -39357,7 +39372,7 @@
                 <a:ea typeface="Calibri" pitchFamily="34" charset="-122"/>
                 <a:cs typeface="Calibri" pitchFamily="34" charset="-120"/>
               </a:rPr>
-              <a:t>2.  The root 'revise' comes from Latin and means to look at again.</a:t>
+              <a:t>2.  The suffix '-ing' changes 'revise' into an adjective.</a:t>
             </a:r>
             <a:endParaRPr lang="en-US" sz="1300" dirty="0"/>
           </a:p>
@@ -39380,11 +39395,11 @@
             </a:avLst>
           </a:prstGeom>
           <a:solidFill>
-            <a:srgbClr val="DCFCE7"/>
-          </a:solidFill>
-          <a:ln w="12700">
-            <a:solidFill>
-              <a:srgbClr val="16A34A"/>
+            <a:srgbClr val="FEE2E2"/>
+          </a:solidFill>
+          <a:ln w="12700">
+            <a:solidFill>
+              <a:srgbClr val="DC2626"/>
             </a:solidFill>
             <a:prstDash val="solid"/>
           </a:ln>
@@ -39417,13 +39432,13 @@
             <a:r>
               <a:rPr lang="en-US" sz="1100" b="1" dirty="0">
                 <a:solidFill>
-                  <a:srgbClr val="16A34A"/>
+                  <a:srgbClr val="DC2626"/>
                 </a:solidFill>
                 <a:latin typeface="Trebuchet MS" pitchFamily="34" charset="0"/>
                 <a:ea typeface="Trebuchet MS" pitchFamily="34" charset="-122"/>
                 <a:cs typeface="Trebuchet MS" pitchFamily="34" charset="-120"/>
               </a:rPr>
-              <a:t>TRUE</a:t>
+              <a:t>FALSE</a:t>
             </a:r>
             <a:endParaRPr lang="en-US" sz="1100" dirty="0"/>
           </a:p>
@@ -39496,7 +39511,7 @@
                 <a:ea typeface="Calibri" pitchFamily="34" charset="-122"/>
                 <a:cs typeface="Calibri" pitchFamily="34" charset="-120"/>
               </a:rPr>
-              <a:t>3.  The suffix '-ing' changes 'revise' into an adjective.</a:t>
+              <a:t>3.  The word 'revision' has nothing to do with the root 'revise'.</a:t>
             </a:r>
             <a:endParaRPr lang="en-US" sz="1300" dirty="0"/>
           </a:p>
@@ -39635,7 +39650,7 @@
                 <a:ea typeface="Calibri" pitchFamily="34" charset="-122"/>
                 <a:cs typeface="Calibri" pitchFamily="34" charset="-120"/>
               </a:rPr>
-              <a:t>4.  The word 'revision' has nothing to do with the root 'revise'.</a:t>
+              <a:t>4.  Adding the suffix '-ion' to 'revise' makes the noun 'revision'.</a:t>
             </a:r>
             <a:endParaRPr lang="en-US" sz="1300" dirty="0"/>
           </a:p>
@@ -39658,11 +39673,11 @@
             </a:avLst>
           </a:prstGeom>
           <a:solidFill>
-            <a:srgbClr val="FEE2E2"/>
-          </a:solidFill>
-          <a:ln w="12700">
-            <a:solidFill>
-              <a:srgbClr val="DC2626"/>
+            <a:srgbClr val="DCFCE7"/>
+          </a:solidFill>
+          <a:ln w="12700">
+            <a:solidFill>
+              <a:srgbClr val="16A34A"/>
             </a:solidFill>
             <a:prstDash val="solid"/>
           </a:ln>
@@ -39695,13 +39710,13 @@
             <a:r>
               <a:rPr lang="en-US" sz="1100" b="1" dirty="0">
                 <a:solidFill>
-                  <a:srgbClr val="DC2626"/>
+                  <a:srgbClr val="16A34A"/>
                 </a:solidFill>
                 <a:latin typeface="Trebuchet MS" pitchFamily="34" charset="0"/>
                 <a:ea typeface="Trebuchet MS" pitchFamily="34" charset="-122"/>
                 <a:cs typeface="Trebuchet MS" pitchFamily="34" charset="-120"/>
               </a:rPr>
-              <a:t>FALSE</a:t>
+              <a:t>TRUE</a:t>
             </a:r>
             <a:endParaRPr lang="en-US" sz="1100" dirty="0"/>
           </a:p>
@@ -39774,7 +39789,7 @@
                 <a:ea typeface="Calibri" pitchFamily="34" charset="-122"/>
                 <a:cs typeface="Calibri" pitchFamily="34" charset="-120"/>
               </a:rPr>
-              <a:t>5.  Adding the suffix '-ion' to 'revise' makes the noun 'revision'.</a:t>
+              <a:t>5.  The prefix 'un-' in 'unrevised' means not or opposite of.</a:t>
             </a:r>
             <a:endParaRPr lang="en-US" sz="1300" dirty="0"/>
           </a:p>
